--- a/slides/module3.pptx
+++ b/slides/module3.pptx
@@ -6937,7 +6937,7 @@
                 </a:solidFill>
                 <a:latin typeface="Arial"/>
               </a:rPr>
-              <a:t>A highly stretched orbit whose apogee dwells over high latitudes GEO can't serve — the Soviet comms trick. Tundra is its 24-hour cousin.</a:t>
+              <a:t>Two designer orbits from one perturbation: J2 parks Molniya’s apogee over the north — and precesses a 98.2° sun-synchronous orbit to track the Sun at +0.9856°/day, same lighting every pass.</a:t>
             </a:r>
           </a:p>
         </p:txBody>
@@ -7820,7 +7820,7 @@
                 </a:solidFill>
                 <a:latin typeface="Arial"/>
               </a:rPr>
-              <a:t>Invent the Molniya orbit by trial and error — then load the real ISS, GPS, and Tundra.</a:t>
+              <a:t>Invent Molniya by trial and error — then ride a sun-synchronous orbit and watch its plane track the Sun.</a:t>
             </a:r>
           </a:p>
         </p:txBody>
